--- a/assets/files/SmartBottle.pptx
+++ b/assets/files/SmartBottle.pptx
@@ -111,6 +111,11 @@
       </a:defRPr>
     </a:lvl9pPr>
   </p:defaultTextStyle>
+  <p:extLst>
+    <p:ext uri="{EFAFB233-063F-42B5-8137-9DF3F51BA10A}">
+      <p15:sldGuideLst xmlns:p15="http://schemas.microsoft.com/office/powerpoint/2012/main"/>
+    </p:ext>
+  </p:extLst>
 </p:presentation>
 </file>
 
@@ -4161,6 +4166,9 @@
                 <a:solidFill>
                   <a:srgbClr val="7030A0"/>
                 </a:solidFill>
+                <a:latin typeface="Calibri" panose="020F0502020204030204" pitchFamily="34" charset="0"/>
+                <a:ea typeface="Calibri" panose="020F0502020204030204" pitchFamily="34" charset="0"/>
+                <a:cs typeface="Calibri" panose="020F0502020204030204" pitchFamily="34" charset="0"/>
               </a:rPr>
               <a:t>SmartBottle</a:t>
             </a:r>
@@ -4182,7 +4190,7 @@
         <p:spPr>
           <a:xfrm>
             <a:off x="838200" y="1229023"/>
-            <a:ext cx="10515600" cy="400110"/>
+            <a:ext cx="10515600" cy="461665"/>
           </a:xfrm>
           <a:prstGeom prst="rect">
             <a:avLst/>
@@ -4197,12 +4205,15 @@
           <a:p>
             <a:pPr algn="ctr"/>
             <a:r>
-              <a:rPr lang="id-ID" sz="2000" dirty="0">
+              <a:rPr lang="id-ID" sz="2400" i="1" dirty="0">
                 <a:solidFill>
                   <a:schemeClr val="accent6">
                     <a:lumMod val="75000"/>
                   </a:schemeClr>
                 </a:solidFill>
+                <a:latin typeface="Calibri" panose="020F0502020204030204" pitchFamily="34" charset="0"/>
+                <a:ea typeface="Calibri" panose="020F0502020204030204" pitchFamily="34" charset="0"/>
+                <a:cs typeface="Calibri" panose="020F0502020204030204" pitchFamily="34" charset="0"/>
               </a:rPr>
               <a:t>"Botol Minum Pintar untuk Gaya Hidup Sehat"</a:t>
             </a:r>
@@ -4803,7 +4814,7 @@
         <p:spPr>
           <a:xfrm>
             <a:off x="838200" y="2263515"/>
-            <a:ext cx="10515600" cy="769441"/>
+            <a:ext cx="10515600" cy="1015663"/>
           </a:xfrm>
           <a:prstGeom prst="rect">
             <a:avLst/>
@@ -4817,6 +4828,16 @@
           <a:lstStyle/>
           <a:p>
             <a:pPr algn="ctr"/>
+            <a:r>
+              <a:rPr lang="en-US" sz="3600" b="1" i="1" dirty="0">
+                <a:solidFill>
+                  <a:schemeClr val="accent6">
+                    <a:lumMod val="50000"/>
+                  </a:schemeClr>
+                </a:solidFill>
+              </a:rPr>
+              <a:t>“</a:t>
+            </a:r>
             <a:r>
               <a:rPr lang="id-ID" sz="2400" i="1" dirty="0">
                 <a:solidFill>
@@ -4825,9 +4846,19 @@
                   </a:schemeClr>
                 </a:solidFill>
               </a:rPr>
-              <a:t>"Sejak memakai SmartBottle saya jadi lebih rutin minum air setiap hari.“</a:t>
-            </a:r>
-            <a:endParaRPr lang="en-US" sz="2400" i="1" dirty="0">
+              <a:t>Sejak memakai SmartBottle saya jadi lebih rutin minum air setiap hari.</a:t>
+            </a:r>
+            <a:r>
+              <a:rPr lang="id-ID" sz="3600" b="1" i="1" dirty="0">
+                <a:solidFill>
+                  <a:schemeClr val="accent6">
+                    <a:lumMod val="50000"/>
+                  </a:schemeClr>
+                </a:solidFill>
+              </a:rPr>
+              <a:t>“</a:t>
+            </a:r>
+            <a:endParaRPr lang="en-US" sz="2400" b="1" i="1" dirty="0">
               <a:solidFill>
                 <a:schemeClr val="accent6">
                   <a:lumMod val="50000"/>
@@ -4838,7 +4869,7 @@
           <a:p>
             <a:pPr algn="ctr"/>
             <a:r>
-              <a:rPr lang="id-ID" sz="2000" i="1" dirty="0">
+              <a:rPr lang="id-ID" sz="2400" i="1" dirty="0">
                 <a:solidFill>
                   <a:schemeClr val="accent6">
                     <a:lumMod val="50000"/>
@@ -4848,36 +4879,16 @@
               <a:t>— </a:t>
             </a:r>
             <a:r>
-              <a:rPr lang="en-US" sz="2000" i="1" dirty="0" err="1">
+              <a:rPr lang="en-US" sz="2400" i="1" dirty="0">
                 <a:solidFill>
                   <a:schemeClr val="accent6">
                     <a:lumMod val="50000"/>
                   </a:schemeClr>
                 </a:solidFill>
               </a:rPr>
-              <a:t>Ony</a:t>
-            </a:r>
-            <a:r>
-              <a:rPr lang="id-ID" sz="2000" i="1" dirty="0">
-                <a:solidFill>
-                  <a:schemeClr val="accent6">
-                    <a:lumMod val="50000"/>
-                  </a:schemeClr>
-                </a:solidFill>
-              </a:rPr>
-              <a:t>, </a:t>
-            </a:r>
-            <a:r>
-              <a:rPr lang="en-US" sz="2000" i="1" dirty="0" err="1">
-                <a:solidFill>
-                  <a:schemeClr val="accent6">
-                    <a:lumMod val="50000"/>
-                  </a:schemeClr>
-                </a:solidFill>
-              </a:rPr>
-              <a:t>Blitar</a:t>
-            </a:r>
-            <a:endParaRPr lang="id-ID" sz="2000" i="1" dirty="0">
+              <a:t>Andi, Jakarta</a:t>
+            </a:r>
+            <a:endParaRPr lang="id-ID" sz="2400" i="1" dirty="0">
               <a:solidFill>
                 <a:schemeClr val="accent6">
                   <a:lumMod val="50000"/>

--- a/assets/files/SmartBottle.pptx
+++ b/assets/files/SmartBottle.pptx
@@ -201,7 +201,7 @@
           <a:p>
             <a:fld id="{7202FEB8-D4D3-4D0F-A218-6AB557840D43}" type="datetimeFigureOut">
               <a:rPr lang="id-ID" smtClean="0"/>
-              <a:t>27/06/2026</a:t>
+              <a:t>10/07/2026</a:t>
             </a:fld>
             <a:endParaRPr lang="id-ID"/>
           </a:p>
@@ -1053,7 +1053,7 @@
           <a:p>
             <a:fld id="{0F106140-170B-4E4C-A358-F4BB235C6210}" type="datetimeFigureOut">
               <a:rPr lang="id-ID" smtClean="0"/>
-              <a:t>27/06/2026</a:t>
+              <a:t>10/07/2026</a:t>
             </a:fld>
             <a:endParaRPr lang="id-ID"/>
           </a:p>
@@ -1253,7 +1253,7 @@
           <a:p>
             <a:fld id="{0F106140-170B-4E4C-A358-F4BB235C6210}" type="datetimeFigureOut">
               <a:rPr lang="id-ID" smtClean="0"/>
-              <a:t>27/06/2026</a:t>
+              <a:t>10/07/2026</a:t>
             </a:fld>
             <a:endParaRPr lang="id-ID"/>
           </a:p>
@@ -1463,7 +1463,7 @@
           <a:p>
             <a:fld id="{0F106140-170B-4E4C-A358-F4BB235C6210}" type="datetimeFigureOut">
               <a:rPr lang="id-ID" smtClean="0"/>
-              <a:t>27/06/2026</a:t>
+              <a:t>10/07/2026</a:t>
             </a:fld>
             <a:endParaRPr lang="id-ID"/>
           </a:p>
@@ -1663,7 +1663,7 @@
           <a:p>
             <a:fld id="{0F106140-170B-4E4C-A358-F4BB235C6210}" type="datetimeFigureOut">
               <a:rPr lang="id-ID" smtClean="0"/>
-              <a:t>27/06/2026</a:t>
+              <a:t>10/07/2026</a:t>
             </a:fld>
             <a:endParaRPr lang="id-ID"/>
           </a:p>
@@ -1939,7 +1939,7 @@
           <a:p>
             <a:fld id="{0F106140-170B-4E4C-A358-F4BB235C6210}" type="datetimeFigureOut">
               <a:rPr lang="id-ID" smtClean="0"/>
-              <a:t>27/06/2026</a:t>
+              <a:t>10/07/2026</a:t>
             </a:fld>
             <a:endParaRPr lang="id-ID"/>
           </a:p>
@@ -2207,7 +2207,7 @@
           <a:p>
             <a:fld id="{0F106140-170B-4E4C-A358-F4BB235C6210}" type="datetimeFigureOut">
               <a:rPr lang="id-ID" smtClean="0"/>
-              <a:t>27/06/2026</a:t>
+              <a:t>10/07/2026</a:t>
             </a:fld>
             <a:endParaRPr lang="id-ID"/>
           </a:p>
@@ -2622,7 +2622,7 @@
           <a:p>
             <a:fld id="{0F106140-170B-4E4C-A358-F4BB235C6210}" type="datetimeFigureOut">
               <a:rPr lang="id-ID" smtClean="0"/>
-              <a:t>27/06/2026</a:t>
+              <a:t>10/07/2026</a:t>
             </a:fld>
             <a:endParaRPr lang="id-ID"/>
           </a:p>
@@ -2764,7 +2764,7 @@
           <a:p>
             <a:fld id="{0F106140-170B-4E4C-A358-F4BB235C6210}" type="datetimeFigureOut">
               <a:rPr lang="id-ID" smtClean="0"/>
-              <a:t>27/06/2026</a:t>
+              <a:t>10/07/2026</a:t>
             </a:fld>
             <a:endParaRPr lang="id-ID"/>
           </a:p>
@@ -2877,7 +2877,7 @@
           <a:p>
             <a:fld id="{0F106140-170B-4E4C-A358-F4BB235C6210}" type="datetimeFigureOut">
               <a:rPr lang="id-ID" smtClean="0"/>
-              <a:t>27/06/2026</a:t>
+              <a:t>10/07/2026</a:t>
             </a:fld>
             <a:endParaRPr lang="id-ID"/>
           </a:p>
@@ -3190,7 +3190,7 @@
           <a:p>
             <a:fld id="{0F106140-170B-4E4C-A358-F4BB235C6210}" type="datetimeFigureOut">
               <a:rPr lang="id-ID" smtClean="0"/>
-              <a:t>27/06/2026</a:t>
+              <a:t>10/07/2026</a:t>
             </a:fld>
             <a:endParaRPr lang="id-ID"/>
           </a:p>
@@ -3479,7 +3479,7 @@
           <a:p>
             <a:fld id="{0F106140-170B-4E4C-A358-F4BB235C6210}" type="datetimeFigureOut">
               <a:rPr lang="id-ID" smtClean="0"/>
-              <a:t>27/06/2026</a:t>
+              <a:t>10/07/2026</a:t>
             </a:fld>
             <a:endParaRPr lang="id-ID"/>
           </a:p>
@@ -3722,7 +3722,7 @@
           <a:p>
             <a:fld id="{0F106140-170B-4E4C-A358-F4BB235C6210}" type="datetimeFigureOut">
               <a:rPr lang="id-ID" smtClean="0"/>
-              <a:t>27/06/2026</a:t>
+              <a:t>10/07/2026</a:t>
             </a:fld>
             <a:endParaRPr lang="id-ID"/>
           </a:p>
@@ -4166,7 +4166,6 @@
                 <a:solidFill>
                   <a:srgbClr val="7030A0"/>
                 </a:solidFill>
-                <a:latin typeface="Calibri" panose="020F0502020204030204" pitchFamily="34" charset="0"/>
                 <a:ea typeface="Calibri" panose="020F0502020204030204" pitchFamily="34" charset="0"/>
                 <a:cs typeface="Calibri" panose="020F0502020204030204" pitchFamily="34" charset="0"/>
               </a:rPr>
@@ -4211,8 +4210,8 @@
                     <a:lumMod val="75000"/>
                   </a:schemeClr>
                 </a:solidFill>
-                <a:latin typeface="Calibri" panose="020F0502020204030204" pitchFamily="34" charset="0"/>
-                <a:ea typeface="Calibri" panose="020F0502020204030204" pitchFamily="34" charset="0"/>
+                <a:latin typeface="Cambria" panose="02040503050406030204" pitchFamily="18" charset="0"/>
+                <a:ea typeface="Cambria" panose="02040503050406030204" pitchFamily="18" charset="0"/>
                 <a:cs typeface="Calibri" panose="020F0502020204030204" pitchFamily="34" charset="0"/>
               </a:rPr>
               <a:t>"Botol Minum Pintar untuk Gaya Hidup Sehat"</a:t>
@@ -4315,7 +4314,7 @@
                   <a:srgbClr val="7030A0"/>
                 </a:solidFill>
               </a:rPr>
-              <a:t>FITUR UTAMA</a:t>
+              <a:t>Fitur Utama</a:t>
             </a:r>
           </a:p>
         </p:txBody>
@@ -4609,7 +4608,7 @@
                   <a:srgbClr val="7030A0"/>
                 </a:solidFill>
               </a:rPr>
-              <a:t>MANFAAT PRODUK</a:t>
+              <a:t>Manfaat Produk</a:t>
             </a:r>
           </a:p>
         </p:txBody>
@@ -4793,8 +4792,12 @@
           <a:p>
             <a:pPr algn="ctr"/>
             <a:r>
-              <a:rPr lang="id-ID" b="1" dirty="0"/>
-              <a:t>TESTIMONI</a:t>
+              <a:rPr lang="id-ID" b="1" dirty="0">
+                <a:solidFill>
+                  <a:srgbClr val="7030A0"/>
+                </a:solidFill>
+              </a:rPr>
+              <a:t>Testimoni</a:t>
             </a:r>
           </a:p>
         </p:txBody>
@@ -4946,19 +4949,19 @@
         </p:nvSpPr>
         <p:spPr/>
         <p:txBody>
-          <a:bodyPr/>
+          <a:bodyPr vert="horz" lIns="91440" tIns="45720" rIns="91440" bIns="45720" rtlCol="0" anchor="ctr">
+            <a:normAutofit/>
+          </a:bodyPr>
           <a:lstStyle/>
           <a:p>
             <a:pPr algn="ctr"/>
             <a:r>
               <a:rPr lang="id-ID" b="1" dirty="0">
                 <a:solidFill>
-                  <a:schemeClr val="tx2"/>
+                  <a:srgbClr val="7030A0"/>
                 </a:solidFill>
-                <a:latin typeface="Segoe UI Black" panose="020B0A02040204020203" pitchFamily="34" charset="0"/>
-                <a:ea typeface="Segoe UI Black" panose="020B0A02040204020203" pitchFamily="34" charset="0"/>
               </a:rPr>
-              <a:t>DAPATKAN SEKARANG!</a:t>
+              <a:t>Dapatkan Sekarang!</a:t>
             </a:r>
           </a:p>
         </p:txBody>
@@ -5054,189 +5057,6 @@
               </a:rPr>
               <a:t>299.000</a:t>
             </a:r>
-          </a:p>
-        </p:txBody>
-      </p:sp>
-      <p:sp>
-        <p:nvSpPr>
-          <p:cNvPr id="5" name="TextBox 4">
-            <a:extLst>
-              <a:ext uri="{FF2B5EF4-FFF2-40B4-BE49-F238E27FC236}">
-                <a16:creationId xmlns:a16="http://schemas.microsoft.com/office/drawing/2014/main" id="{270BBF00-45C5-FA79-2C5E-A44E274E65B7}"/>
-              </a:ext>
-            </a:extLst>
-          </p:cNvPr>
-          <p:cNvSpPr txBox="1"/>
-          <p:nvPr/>
-        </p:nvSpPr>
-        <p:spPr>
-          <a:xfrm>
-            <a:off x="1933543" y="3656177"/>
-            <a:ext cx="2499402" cy="400110"/>
-          </a:xfrm>
-          <a:prstGeom prst="rect">
-            <a:avLst/>
-          </a:prstGeom>
-          <a:noFill/>
-        </p:spPr>
-        <p:txBody>
-          <a:bodyPr wrap="none" rtlCol="0">
-            <a:spAutoFit/>
-          </a:bodyPr>
-          <a:lstStyle/>
-          <a:p>
-            <a:r>
-              <a:rPr lang="id-ID" sz="2000" dirty="0">
-                <a:solidFill>
-                  <a:schemeClr val="accent6">
-                    <a:lumMod val="50000"/>
-                  </a:schemeClr>
-                </a:solidFill>
-                <a:latin typeface="Arial Narrow" panose="020B0606020202030204" pitchFamily="34" charset="0"/>
-              </a:rPr>
-              <a:t>WhatsApp</a:t>
-            </a:r>
-            <a:r>
-              <a:rPr lang="en-US" sz="2000" dirty="0">
-                <a:solidFill>
-                  <a:schemeClr val="accent6">
-                    <a:lumMod val="50000"/>
-                  </a:schemeClr>
-                </a:solidFill>
-                <a:latin typeface="Arial Narrow" panose="020B0606020202030204" pitchFamily="34" charset="0"/>
-              </a:rPr>
-              <a:t> : 0123456789</a:t>
-            </a:r>
-            <a:endParaRPr lang="id-ID" sz="2000" dirty="0">
-              <a:solidFill>
-                <a:schemeClr val="accent6">
-                  <a:lumMod val="50000"/>
-                </a:schemeClr>
-              </a:solidFill>
-              <a:latin typeface="Arial Narrow" panose="020B0606020202030204" pitchFamily="34" charset="0"/>
-            </a:endParaRPr>
-          </a:p>
-        </p:txBody>
-      </p:sp>
-      <p:sp>
-        <p:nvSpPr>
-          <p:cNvPr id="7" name="TextBox 6">
-            <a:extLst>
-              <a:ext uri="{FF2B5EF4-FFF2-40B4-BE49-F238E27FC236}">
-                <a16:creationId xmlns:a16="http://schemas.microsoft.com/office/drawing/2014/main" id="{8FBB3F06-A7A5-C745-82C6-394E5513ACFE}"/>
-              </a:ext>
-            </a:extLst>
-          </p:cNvPr>
-          <p:cNvSpPr txBox="1"/>
-          <p:nvPr/>
-        </p:nvSpPr>
-        <p:spPr>
-          <a:xfrm>
-            <a:off x="1933543" y="4056287"/>
-            <a:ext cx="2685351" cy="400110"/>
-          </a:xfrm>
-          <a:prstGeom prst="rect">
-            <a:avLst/>
-          </a:prstGeom>
-          <a:noFill/>
-        </p:spPr>
-        <p:txBody>
-          <a:bodyPr wrap="none" rtlCol="0">
-            <a:spAutoFit/>
-          </a:bodyPr>
-          <a:lstStyle/>
-          <a:p>
-            <a:r>
-              <a:rPr lang="id-ID" sz="2000" dirty="0">
-                <a:solidFill>
-                  <a:schemeClr val="accent6">
-                    <a:lumMod val="50000"/>
-                  </a:schemeClr>
-                </a:solidFill>
-                <a:latin typeface="Arial Narrow" panose="020B0606020202030204" pitchFamily="34" charset="0"/>
-              </a:rPr>
-              <a:t>Email</a:t>
-            </a:r>
-            <a:r>
-              <a:rPr lang="en-US" sz="2000" dirty="0">
-                <a:solidFill>
-                  <a:schemeClr val="accent6">
-                    <a:lumMod val="50000"/>
-                  </a:schemeClr>
-                </a:solidFill>
-                <a:latin typeface="Arial Narrow" panose="020B0606020202030204" pitchFamily="34" charset="0"/>
-              </a:rPr>
-              <a:t> : contoh@email.com</a:t>
-            </a:r>
-            <a:endParaRPr lang="id-ID" sz="2000" dirty="0">
-              <a:solidFill>
-                <a:schemeClr val="accent6">
-                  <a:lumMod val="50000"/>
-                </a:schemeClr>
-              </a:solidFill>
-              <a:latin typeface="Arial Narrow" panose="020B0606020202030204" pitchFamily="34" charset="0"/>
-            </a:endParaRPr>
-          </a:p>
-        </p:txBody>
-      </p:sp>
-      <p:sp>
-        <p:nvSpPr>
-          <p:cNvPr id="9" name="TextBox 8">
-            <a:extLst>
-              <a:ext uri="{FF2B5EF4-FFF2-40B4-BE49-F238E27FC236}">
-                <a16:creationId xmlns:a16="http://schemas.microsoft.com/office/drawing/2014/main" id="{51144129-885F-B00B-156B-204B11FF641A}"/>
-              </a:ext>
-            </a:extLst>
-          </p:cNvPr>
-          <p:cNvSpPr txBox="1"/>
-          <p:nvPr/>
-        </p:nvSpPr>
-        <p:spPr>
-          <a:xfrm>
-            <a:off x="1933543" y="4456397"/>
-            <a:ext cx="2282548" cy="400110"/>
-          </a:xfrm>
-          <a:prstGeom prst="rect">
-            <a:avLst/>
-          </a:prstGeom>
-          <a:noFill/>
-        </p:spPr>
-        <p:txBody>
-          <a:bodyPr wrap="none" rtlCol="0">
-            <a:spAutoFit/>
-          </a:bodyPr>
-          <a:lstStyle/>
-          <a:p>
-            <a:r>
-              <a:rPr lang="id-ID" sz="2000" dirty="0">
-                <a:solidFill>
-                  <a:schemeClr val="accent6">
-                    <a:lumMod val="50000"/>
-                  </a:schemeClr>
-                </a:solidFill>
-                <a:latin typeface="Arial Narrow" panose="020B0606020202030204" pitchFamily="34" charset="0"/>
-              </a:rPr>
-              <a:t>Website</a:t>
-            </a:r>
-            <a:r>
-              <a:rPr lang="en-US" sz="2000" dirty="0">
-                <a:solidFill>
-                  <a:schemeClr val="accent6">
-                    <a:lumMod val="50000"/>
-                  </a:schemeClr>
-                </a:solidFill>
-                <a:latin typeface="Arial Narrow" panose="020B0606020202030204" pitchFamily="34" charset="0"/>
-              </a:rPr>
-              <a:t> : website.com</a:t>
-            </a:r>
-            <a:endParaRPr lang="id-ID" sz="2000" dirty="0">
-              <a:solidFill>
-                <a:schemeClr val="accent6">
-                  <a:lumMod val="50000"/>
-                </a:schemeClr>
-              </a:solidFill>
-              <a:latin typeface="Arial Narrow" panose="020B0606020202030204" pitchFamily="34" charset="0"/>
-            </a:endParaRPr>
           </a:p>
         </p:txBody>
       </p:sp>
@@ -5295,6 +5115,117 @@
                 </a:effectLst>
               </a:rPr>
               <a:t>Pesan Sekarang</a:t>
+            </a:r>
+          </a:p>
+        </p:txBody>
+      </p:sp>
+      <p:sp>
+        <p:nvSpPr>
+          <p:cNvPr id="6" name="TextBox 5">
+            <a:extLst>
+              <a:ext uri="{FF2B5EF4-FFF2-40B4-BE49-F238E27FC236}">
+                <a16:creationId xmlns:a16="http://schemas.microsoft.com/office/drawing/2014/main" id="{D9EDD534-AB62-8CC1-3F7B-8265D889F67B}"/>
+              </a:ext>
+            </a:extLst>
+          </p:cNvPr>
+          <p:cNvSpPr txBox="1"/>
+          <p:nvPr/>
+        </p:nvSpPr>
+        <p:spPr>
+          <a:xfrm>
+            <a:off x="1933543" y="3893696"/>
+            <a:ext cx="3322820" cy="923330"/>
+          </a:xfrm>
+          <a:prstGeom prst="rect">
+            <a:avLst/>
+          </a:prstGeom>
+          <a:noFill/>
+        </p:spPr>
+        <p:txBody>
+          <a:bodyPr wrap="square" rtlCol="0">
+            <a:spAutoFit/>
+          </a:bodyPr>
+          <a:lstStyle/>
+          <a:p>
+            <a:pPr marL="285750" indent="-285750">
+              <a:buFont typeface="Wingdings" panose="05000000000000000000" pitchFamily="2" charset="2"/>
+              <a:buChar char="Ø"/>
+            </a:pPr>
+            <a:r>
+              <a:rPr lang="id-ID" dirty="0">
+                <a:solidFill>
+                  <a:srgbClr val="002060"/>
+                </a:solidFill>
+              </a:rPr>
+              <a:t>WhatsApp : 0123456789</a:t>
+            </a:r>
+            <a:endParaRPr lang="en-US" dirty="0">
+              <a:solidFill>
+                <a:srgbClr val="002060"/>
+              </a:solidFill>
+            </a:endParaRPr>
+          </a:p>
+          <a:p>
+            <a:pPr marL="285750" indent="-285750">
+              <a:buFont typeface="Wingdings" panose="05000000000000000000" pitchFamily="2" charset="2"/>
+              <a:buChar char="Ø"/>
+            </a:pPr>
+            <a:r>
+              <a:rPr lang="id-ID" dirty="0">
+                <a:solidFill>
+                  <a:srgbClr val="002060"/>
+                </a:solidFill>
+              </a:rPr>
+              <a:t>Email : </a:t>
+            </a:r>
+            <a:r>
+              <a:rPr lang="id-ID" dirty="0">
+                <a:solidFill>
+                  <a:srgbClr val="467886"/>
+                </a:solidFill>
+                <a:hlinkClick r:id="rId3">
+                  <a:extLst>
+                    <a:ext uri="{A12FA001-AC4F-418D-AE19-62706E023703}">
+                      <ahyp:hlinkClr xmlns:ahyp="http://schemas.microsoft.com/office/drawing/2018/hyperlinkcolor" val="tx"/>
+                    </a:ext>
+                  </a:extLst>
+                </a:hlinkClick>
+              </a:rPr>
+              <a:t>contoh@email.</a:t>
+            </a:r>
+            <a:r>
+              <a:rPr lang="id-ID" dirty="0">
+                <a:solidFill>
+                  <a:srgbClr val="002060"/>
+                </a:solidFill>
+                <a:hlinkClick r:id="rId3">
+                  <a:extLst>
+                    <a:ext uri="{A12FA001-AC4F-418D-AE19-62706E023703}">
+                      <ahyp:hlinkClr xmlns:ahyp="http://schemas.microsoft.com/office/drawing/2018/hyperlinkcolor" val="tx"/>
+                    </a:ext>
+                  </a:extLst>
+                </a:hlinkClick>
+              </a:rPr>
+              <a:t>com</a:t>
+            </a:r>
+            <a:endParaRPr lang="en-US" dirty="0">
+              <a:solidFill>
+                <a:srgbClr val="002060"/>
+              </a:solidFill>
+            </a:endParaRPr>
+          </a:p>
+          <a:p>
+            <a:pPr marL="285750" indent="-285750">
+              <a:buFont typeface="Wingdings" panose="05000000000000000000" pitchFamily="2" charset="2"/>
+              <a:buChar char="Ø"/>
+            </a:pPr>
+            <a:r>
+              <a:rPr lang="id-ID" dirty="0">
+                <a:solidFill>
+                  <a:srgbClr val="002060"/>
+                </a:solidFill>
+              </a:rPr>
+              <a:t>Website : website.com</a:t>
             </a:r>
           </a:p>
         </p:txBody>

--- a/assets/files/SmartBottle.pptx
+++ b/assets/files/SmartBottle.pptx
@@ -201,7 +201,7 @@
           <a:p>
             <a:fld id="{7202FEB8-D4D3-4D0F-A218-6AB557840D43}" type="datetimeFigureOut">
               <a:rPr lang="id-ID" smtClean="0"/>
-              <a:t>10/07/2026</a:t>
+              <a:t>15/07/2026</a:t>
             </a:fld>
             <a:endParaRPr lang="id-ID"/>
           </a:p>
@@ -1053,7 +1053,7 @@
           <a:p>
             <a:fld id="{0F106140-170B-4E4C-A358-F4BB235C6210}" type="datetimeFigureOut">
               <a:rPr lang="id-ID" smtClean="0"/>
-              <a:t>10/07/2026</a:t>
+              <a:t>15/07/2026</a:t>
             </a:fld>
             <a:endParaRPr lang="id-ID"/>
           </a:p>
@@ -1253,7 +1253,7 @@
           <a:p>
             <a:fld id="{0F106140-170B-4E4C-A358-F4BB235C6210}" type="datetimeFigureOut">
               <a:rPr lang="id-ID" smtClean="0"/>
-              <a:t>10/07/2026</a:t>
+              <a:t>15/07/2026</a:t>
             </a:fld>
             <a:endParaRPr lang="id-ID"/>
           </a:p>
@@ -1463,7 +1463,7 @@
           <a:p>
             <a:fld id="{0F106140-170B-4E4C-A358-F4BB235C6210}" type="datetimeFigureOut">
               <a:rPr lang="id-ID" smtClean="0"/>
-              <a:t>10/07/2026</a:t>
+              <a:t>15/07/2026</a:t>
             </a:fld>
             <a:endParaRPr lang="id-ID"/>
           </a:p>
@@ -1663,7 +1663,7 @@
           <a:p>
             <a:fld id="{0F106140-170B-4E4C-A358-F4BB235C6210}" type="datetimeFigureOut">
               <a:rPr lang="id-ID" smtClean="0"/>
-              <a:t>10/07/2026</a:t>
+              <a:t>15/07/2026</a:t>
             </a:fld>
             <a:endParaRPr lang="id-ID"/>
           </a:p>
@@ -1939,7 +1939,7 @@
           <a:p>
             <a:fld id="{0F106140-170B-4E4C-A358-F4BB235C6210}" type="datetimeFigureOut">
               <a:rPr lang="id-ID" smtClean="0"/>
-              <a:t>10/07/2026</a:t>
+              <a:t>15/07/2026</a:t>
             </a:fld>
             <a:endParaRPr lang="id-ID"/>
           </a:p>
@@ -2207,7 +2207,7 @@
           <a:p>
             <a:fld id="{0F106140-170B-4E4C-A358-F4BB235C6210}" type="datetimeFigureOut">
               <a:rPr lang="id-ID" smtClean="0"/>
-              <a:t>10/07/2026</a:t>
+              <a:t>15/07/2026</a:t>
             </a:fld>
             <a:endParaRPr lang="id-ID"/>
           </a:p>
@@ -2622,7 +2622,7 @@
           <a:p>
             <a:fld id="{0F106140-170B-4E4C-A358-F4BB235C6210}" type="datetimeFigureOut">
               <a:rPr lang="id-ID" smtClean="0"/>
-              <a:t>10/07/2026</a:t>
+              <a:t>15/07/2026</a:t>
             </a:fld>
             <a:endParaRPr lang="id-ID"/>
           </a:p>
@@ -2764,7 +2764,7 @@
           <a:p>
             <a:fld id="{0F106140-170B-4E4C-A358-F4BB235C6210}" type="datetimeFigureOut">
               <a:rPr lang="id-ID" smtClean="0"/>
-              <a:t>10/07/2026</a:t>
+              <a:t>15/07/2026</a:t>
             </a:fld>
             <a:endParaRPr lang="id-ID"/>
           </a:p>
@@ -2877,7 +2877,7 @@
           <a:p>
             <a:fld id="{0F106140-170B-4E4C-A358-F4BB235C6210}" type="datetimeFigureOut">
               <a:rPr lang="id-ID" smtClean="0"/>
-              <a:t>10/07/2026</a:t>
+              <a:t>15/07/2026</a:t>
             </a:fld>
             <a:endParaRPr lang="id-ID"/>
           </a:p>
@@ -3190,7 +3190,7 @@
           <a:p>
             <a:fld id="{0F106140-170B-4E4C-A358-F4BB235C6210}" type="datetimeFigureOut">
               <a:rPr lang="id-ID" smtClean="0"/>
-              <a:t>10/07/2026</a:t>
+              <a:t>15/07/2026</a:t>
             </a:fld>
             <a:endParaRPr lang="id-ID"/>
           </a:p>
@@ -3479,7 +3479,7 @@
           <a:p>
             <a:fld id="{0F106140-170B-4E4C-A358-F4BB235C6210}" type="datetimeFigureOut">
               <a:rPr lang="id-ID" smtClean="0"/>
-              <a:t>10/07/2026</a:t>
+              <a:t>15/07/2026</a:t>
             </a:fld>
             <a:endParaRPr lang="id-ID"/>
           </a:p>
@@ -3722,7 +3722,7 @@
           <a:p>
             <a:fld id="{0F106140-170B-4E4C-A358-F4BB235C6210}" type="datetimeFigureOut">
               <a:rPr lang="id-ID" smtClean="0"/>
-              <a:t>10/07/2026</a:t>
+              <a:t>15/07/2026</a:t>
             </a:fld>
             <a:endParaRPr lang="id-ID"/>
           </a:p>
@@ -4157,19 +4157,31 @@
         </p:nvSpPr>
         <p:spPr/>
         <p:txBody>
-          <a:bodyPr/>
+          <a:bodyPr>
+            <a:normAutofit/>
+          </a:bodyPr>
           <a:lstStyle/>
           <a:p>
             <a:pPr algn="ctr"/>
             <a:r>
-              <a:rPr lang="id-ID" b="1" dirty="0">
+              <a:rPr lang="id-ID" sz="4000" b="1" dirty="0">
                 <a:solidFill>
-                  <a:srgbClr val="7030A0"/>
+                  <a:srgbClr val="002060"/>
                 </a:solidFill>
                 <a:ea typeface="Calibri" panose="020F0502020204030204" pitchFamily="34" charset="0"/>
                 <a:cs typeface="Calibri" panose="020F0502020204030204" pitchFamily="34" charset="0"/>
               </a:rPr>
-              <a:t>SmartBottle</a:t>
+              <a:t>Smart</a:t>
+            </a:r>
+            <a:r>
+              <a:rPr lang="id-ID" sz="4000" b="1" dirty="0">
+                <a:solidFill>
+                  <a:srgbClr val="C00000"/>
+                </a:solidFill>
+                <a:ea typeface="Calibri" panose="020F0502020204030204" pitchFamily="34" charset="0"/>
+                <a:cs typeface="Calibri" panose="020F0502020204030204" pitchFamily="34" charset="0"/>
+              </a:rPr>
+              <a:t>Bottle</a:t>
             </a:r>
           </a:p>
         </p:txBody>
@@ -4188,8 +4200,8 @@
         </p:nvSpPr>
         <p:spPr>
           <a:xfrm>
-            <a:off x="838200" y="1229023"/>
-            <a:ext cx="10515600" cy="461665"/>
+            <a:off x="838200" y="1259003"/>
+            <a:ext cx="10515600" cy="400110"/>
           </a:xfrm>
           <a:prstGeom prst="rect">
             <a:avLst/>
@@ -4204,7 +4216,7 @@
           <a:p>
             <a:pPr algn="ctr"/>
             <a:r>
-              <a:rPr lang="id-ID" sz="2400" i="1" dirty="0">
+              <a:rPr lang="id-ID" sz="2000" i="1" dirty="0">
                 <a:solidFill>
                   <a:schemeClr val="accent6">
                     <a:lumMod val="75000"/>
@@ -4304,17 +4316,19 @@
         </p:nvSpPr>
         <p:spPr/>
         <p:txBody>
-          <a:bodyPr/>
+          <a:bodyPr>
+            <a:normAutofit/>
+          </a:bodyPr>
           <a:lstStyle/>
           <a:p>
             <a:pPr algn="ctr"/>
             <a:r>
-              <a:rPr lang="id-ID" b="1" dirty="0">
+              <a:rPr lang="id-ID" sz="3600" b="1" dirty="0">
                 <a:solidFill>
-                  <a:srgbClr val="7030A0"/>
+                  <a:srgbClr val="002060"/>
                 </a:solidFill>
               </a:rPr>
-              <a:t>Fitur Utama</a:t>
+              <a:t>FITUR UTAMA</a:t>
             </a:r>
           </a:p>
         </p:txBody>
@@ -4347,7 +4361,7 @@
         </p:blipFill>
         <p:spPr>
           <a:xfrm>
-            <a:off x="2880609" y="1690688"/>
+            <a:off x="3615127" y="1990979"/>
             <a:ext cx="914400" cy="914400"/>
           </a:xfrm>
           <a:prstGeom prst="rect">
@@ -4369,7 +4383,7 @@
         </p:nvSpPr>
         <p:spPr>
           <a:xfrm>
-            <a:off x="4302176" y="1963222"/>
+            <a:off x="5036694" y="2263513"/>
             <a:ext cx="2466894" cy="461665"/>
           </a:xfrm>
           <a:prstGeom prst="rect">
@@ -4424,7 +4438,7 @@
         </p:blipFill>
         <p:spPr>
           <a:xfrm>
-            <a:off x="2880609" y="2856175"/>
+            <a:off x="3615127" y="3156466"/>
             <a:ext cx="914400" cy="914400"/>
           </a:xfrm>
           <a:prstGeom prst="rect">
@@ -4446,7 +4460,7 @@
         </p:nvSpPr>
         <p:spPr>
           <a:xfrm>
-            <a:off x="4302176" y="3128709"/>
+            <a:off x="5036694" y="3429000"/>
             <a:ext cx="3162789" cy="461665"/>
           </a:xfrm>
           <a:prstGeom prst="rect">
@@ -4501,7 +4515,7 @@
         </p:blipFill>
         <p:spPr>
           <a:xfrm>
-            <a:off x="2880609" y="4021662"/>
+            <a:off x="3615127" y="4321953"/>
             <a:ext cx="914400" cy="914400"/>
           </a:xfrm>
           <a:prstGeom prst="rect">
@@ -4523,7 +4537,7 @@
         </p:nvSpPr>
         <p:spPr>
           <a:xfrm>
-            <a:off x="4302176" y="4305439"/>
+            <a:off x="5036694" y="4605730"/>
             <a:ext cx="2823593" cy="461665"/>
           </a:xfrm>
           <a:prstGeom prst="rect">
@@ -4598,17 +4612,19 @@
         </p:nvSpPr>
         <p:spPr/>
         <p:txBody>
-          <a:bodyPr/>
+          <a:bodyPr>
+            <a:normAutofit/>
+          </a:bodyPr>
           <a:lstStyle/>
           <a:p>
             <a:pPr algn="ctr"/>
             <a:r>
-              <a:rPr lang="id-ID" b="1" dirty="0">
+              <a:rPr lang="id-ID" sz="4000" b="1" dirty="0">
                 <a:solidFill>
-                  <a:srgbClr val="7030A0"/>
+                  <a:srgbClr val="002060"/>
                 </a:solidFill>
               </a:rPr>
-              <a:t>Manfaat Produk</a:t>
+              <a:t>MANFAAT PRODUK</a:t>
             </a:r>
           </a:p>
         </p:txBody>
@@ -4627,8 +4643,8 @@
         </p:nvSpPr>
         <p:spPr>
           <a:xfrm>
-            <a:off x="2428407" y="2068642"/>
-            <a:ext cx="5425268" cy="2947538"/>
+            <a:off x="3794312" y="2193149"/>
+            <a:ext cx="4661084" cy="2471702"/>
           </a:xfrm>
           <a:prstGeom prst="rect">
             <a:avLst/>
@@ -4641,15 +4657,15 @@
           </a:bodyPr>
           <a:lstStyle/>
           <a:p>
-            <a:pPr marL="285750" indent="-285750">
+            <a:pPr marL="342900" indent="-342900">
               <a:lnSpc>
                 <a:spcPct val="200000"/>
               </a:lnSpc>
-              <a:buFont typeface="Arial" panose="020B0604020202020204" pitchFamily="34" charset="0"/>
-              <a:buChar char="•"/>
+              <a:buFont typeface="Wingdings" panose="05000000000000000000" pitchFamily="2" charset="2"/>
+              <a:buChar char="ü"/>
             </a:pPr>
             <a:r>
-              <a:rPr lang="id-ID" sz="2400" dirty="0">
+              <a:rPr lang="id-ID" sz="2000" dirty="0">
                 <a:solidFill>
                   <a:schemeClr val="accent6">
                     <a:lumMod val="50000"/>
@@ -4658,7 +4674,7 @@
               </a:rPr>
               <a:t>Membantu menjaga hidrasi tubuh </a:t>
             </a:r>
-            <a:endParaRPr lang="en-US" sz="2400" dirty="0">
+            <a:endParaRPr lang="en-US" sz="2000" dirty="0">
               <a:solidFill>
                 <a:schemeClr val="accent6">
                   <a:lumMod val="50000"/>
@@ -4667,15 +4683,15 @@
             </a:endParaRPr>
           </a:p>
           <a:p>
-            <a:pPr marL="285750" indent="-285750">
+            <a:pPr marL="342900" indent="-342900">
               <a:lnSpc>
                 <a:spcPct val="200000"/>
               </a:lnSpc>
-              <a:buFont typeface="Arial" panose="020B0604020202020204" pitchFamily="34" charset="0"/>
-              <a:buChar char="•"/>
+              <a:buFont typeface="Wingdings" panose="05000000000000000000" pitchFamily="2" charset="2"/>
+              <a:buChar char="ü"/>
             </a:pPr>
             <a:r>
-              <a:rPr lang="id-ID" sz="2400" dirty="0">
+              <a:rPr lang="id-ID" sz="2000" dirty="0">
                 <a:solidFill>
                   <a:schemeClr val="accent6">
                     <a:lumMod val="50000"/>
@@ -4684,7 +4700,7 @@
               </a:rPr>
               <a:t>Praktis dibawa ke mana saja </a:t>
             </a:r>
-            <a:endParaRPr lang="en-US" sz="2400" dirty="0">
+            <a:endParaRPr lang="en-US" sz="2000" dirty="0">
               <a:solidFill>
                 <a:schemeClr val="accent6">
                   <a:lumMod val="50000"/>
@@ -4693,15 +4709,15 @@
             </a:endParaRPr>
           </a:p>
           <a:p>
-            <a:pPr marL="285750" indent="-285750">
+            <a:pPr marL="342900" indent="-342900">
               <a:lnSpc>
                 <a:spcPct val="200000"/>
               </a:lnSpc>
-              <a:buFont typeface="Arial" panose="020B0604020202020204" pitchFamily="34" charset="0"/>
-              <a:buChar char="•"/>
+              <a:buFont typeface="Wingdings" panose="05000000000000000000" pitchFamily="2" charset="2"/>
+              <a:buChar char="ü"/>
             </a:pPr>
             <a:r>
-              <a:rPr lang="id-ID" sz="2400" dirty="0">
+              <a:rPr lang="id-ID" sz="2000" dirty="0">
                 <a:solidFill>
                   <a:schemeClr val="accent6">
                     <a:lumMod val="50000"/>
@@ -4710,7 +4726,7 @@
               </a:rPr>
               <a:t>Ramah lingkungan </a:t>
             </a:r>
-            <a:endParaRPr lang="en-US" sz="2400" dirty="0">
+            <a:endParaRPr lang="en-US" sz="2000" dirty="0">
               <a:solidFill>
                 <a:schemeClr val="accent6">
                   <a:lumMod val="50000"/>
@@ -4719,15 +4735,15 @@
             </a:endParaRPr>
           </a:p>
           <a:p>
-            <a:pPr marL="285750" indent="-285750">
+            <a:pPr marL="342900" indent="-342900">
               <a:lnSpc>
                 <a:spcPct val="200000"/>
               </a:lnSpc>
-              <a:buFont typeface="Arial" panose="020B0604020202020204" pitchFamily="34" charset="0"/>
-              <a:buChar char="•"/>
+              <a:buFont typeface="Wingdings" panose="05000000000000000000" pitchFamily="2" charset="2"/>
+              <a:buChar char="ü"/>
             </a:pPr>
             <a:r>
-              <a:rPr lang="id-ID" sz="2400" dirty="0">
+              <a:rPr lang="id-ID" sz="2000" dirty="0">
                 <a:solidFill>
                   <a:schemeClr val="accent6">
                     <a:lumMod val="50000"/>
@@ -4787,17 +4803,19 @@
         </p:nvSpPr>
         <p:spPr/>
         <p:txBody>
-          <a:bodyPr/>
+          <a:bodyPr>
+            <a:normAutofit/>
+          </a:bodyPr>
           <a:lstStyle/>
           <a:p>
             <a:pPr algn="ctr"/>
             <a:r>
-              <a:rPr lang="id-ID" b="1" dirty="0">
+              <a:rPr lang="id-ID" sz="4000" b="1" dirty="0">
                 <a:solidFill>
-                  <a:srgbClr val="7030A0"/>
+                  <a:srgbClr val="002060"/>
                 </a:solidFill>
               </a:rPr>
-              <a:t>Testimoni</a:t>
+              <a:t>TESTIMONI</a:t>
             </a:r>
           </a:p>
         </p:txBody>
@@ -4816,8 +4834,8 @@
         </p:nvSpPr>
         <p:spPr>
           <a:xfrm>
-            <a:off x="838200" y="2263515"/>
-            <a:ext cx="10515600" cy="1015663"/>
+            <a:off x="838200" y="2921168"/>
+            <a:ext cx="10515600" cy="1508105"/>
           </a:xfrm>
           <a:prstGeom prst="rect">
             <a:avLst/>
@@ -4832,10 +4850,10 @@
           <a:p>
             <a:pPr algn="ctr"/>
             <a:r>
-              <a:rPr lang="en-US" sz="3600" b="1" i="1" dirty="0">
+              <a:rPr lang="en-US" sz="7200" b="1" i="1" dirty="0">
                 <a:solidFill>
-                  <a:schemeClr val="accent6">
-                    <a:lumMod val="50000"/>
+                  <a:schemeClr val="bg1">
+                    <a:lumMod val="75000"/>
                   </a:schemeClr>
                 </a:solidFill>
               </a:rPr>
@@ -4849,22 +4867,32 @@
                   </a:schemeClr>
                 </a:solidFill>
               </a:rPr>
-              <a:t>Sejak memakai SmartBottle saya jadi lebih rutin minum air setiap hari.</a:t>
-            </a:r>
-            <a:r>
-              <a:rPr lang="id-ID" sz="3600" b="1" i="1" dirty="0">
+              <a:t>Sejak memakai SmartBottle saya jadi lebih rutin minum air setiap hari</a:t>
+            </a:r>
+            <a:r>
+              <a:rPr lang="id-ID" sz="2400" i="1" dirty="0">
                 <a:solidFill>
-                  <a:schemeClr val="accent6">
-                    <a:lumMod val="50000"/>
+                  <a:schemeClr val="bg1">
+                    <a:lumMod val="75000"/>
+                  </a:schemeClr>
+                </a:solidFill>
+              </a:rPr>
+              <a:t>.</a:t>
+            </a:r>
+            <a:r>
+              <a:rPr lang="id-ID" sz="7200" b="1" i="1" dirty="0">
+                <a:solidFill>
+                  <a:schemeClr val="bg1">
+                    <a:lumMod val="75000"/>
                   </a:schemeClr>
                 </a:solidFill>
               </a:rPr>
               <a:t>“</a:t>
             </a:r>
-            <a:endParaRPr lang="en-US" sz="2400" b="1" i="1" dirty="0">
+            <a:endParaRPr lang="en-US" sz="7200" b="1" i="1" dirty="0">
               <a:solidFill>
-                <a:schemeClr val="accent6">
-                  <a:lumMod val="50000"/>
+                <a:schemeClr val="bg1">
+                  <a:lumMod val="75000"/>
                 </a:schemeClr>
               </a:solidFill>
             </a:endParaRPr>
@@ -4872,7 +4900,7 @@
           <a:p>
             <a:pPr algn="ctr"/>
             <a:r>
-              <a:rPr lang="id-ID" sz="2400" i="1" dirty="0">
+              <a:rPr lang="id-ID" sz="2000" i="1" dirty="0">
                 <a:solidFill>
                   <a:schemeClr val="accent6">
                     <a:lumMod val="50000"/>
@@ -4882,7 +4910,7 @@
               <a:t>— </a:t>
             </a:r>
             <a:r>
-              <a:rPr lang="en-US" sz="2400" i="1" dirty="0">
+              <a:rPr lang="en-US" sz="2000" i="1" dirty="0">
                 <a:solidFill>
                   <a:schemeClr val="accent6">
                     <a:lumMod val="50000"/>
@@ -4891,7 +4919,7 @@
               </a:rPr>
               <a:t>Andi, Jakarta</a:t>
             </a:r>
-            <a:endParaRPr lang="id-ID" sz="2400" i="1" dirty="0">
+            <a:endParaRPr lang="id-ID" sz="2000" i="1" dirty="0">
               <a:solidFill>
                 <a:schemeClr val="accent6">
                   <a:lumMod val="50000"/>
@@ -4956,12 +4984,12 @@
           <a:p>
             <a:pPr algn="ctr"/>
             <a:r>
-              <a:rPr lang="id-ID" b="1" dirty="0">
+              <a:rPr lang="id-ID" sz="4000" b="1" dirty="0">
                 <a:solidFill>
-                  <a:srgbClr val="7030A0"/>
+                  <a:srgbClr val="002060"/>
                 </a:solidFill>
               </a:rPr>
-              <a:t>Dapatkan Sekarang!</a:t>
+              <a:t>DAPATKAN SEKARANG!</a:t>
             </a:r>
           </a:p>
         </p:txBody>
@@ -4980,7 +5008,7 @@
         </p:nvSpPr>
         <p:spPr>
           <a:xfrm>
-            <a:off x="1933543" y="2441085"/>
+            <a:off x="1679570" y="1896804"/>
             <a:ext cx="1365695" cy="523220"/>
           </a:xfrm>
           <a:prstGeom prst="rect">
@@ -4997,7 +5025,7 @@
             <a:r>
               <a:rPr lang="id-ID" sz="2800" b="1" dirty="0">
                 <a:solidFill>
-                  <a:srgbClr val="C00000"/>
+                  <a:srgbClr val="7030A0"/>
                 </a:solidFill>
               </a:rPr>
               <a:t>HARGA</a:t>
@@ -5019,8 +5047,8 @@
         </p:nvSpPr>
         <p:spPr>
           <a:xfrm>
-            <a:off x="3521766" y="2241030"/>
-            <a:ext cx="3600666" cy="923330"/>
+            <a:off x="2187642" y="2330527"/>
+            <a:ext cx="4738798" cy="1200329"/>
           </a:xfrm>
           <a:prstGeom prst="rect">
             <a:avLst/>
@@ -5034,7 +5062,7 @@
           <a:lstStyle/>
           <a:p>
             <a:r>
-              <a:rPr lang="id-ID" sz="5400" b="1" dirty="0">
+              <a:rPr lang="id-ID" sz="7200" b="1" dirty="0">
                 <a:solidFill>
                   <a:srgbClr val="FF0000"/>
                 </a:solidFill>
@@ -5042,7 +5070,7 @@
               <a:t>Rp</a:t>
             </a:r>
             <a:r>
-              <a:rPr lang="en-US" sz="5400" b="1" dirty="0">
+              <a:rPr lang="en-US" sz="7200" b="1" dirty="0">
                 <a:solidFill>
                   <a:srgbClr val="FF0000"/>
                 </a:solidFill>
@@ -5050,7 +5078,7 @@
               <a:t> </a:t>
             </a:r>
             <a:r>
-              <a:rPr lang="id-ID" sz="5400" b="1" dirty="0">
+              <a:rPr lang="id-ID" sz="7200" b="1" dirty="0">
                 <a:solidFill>
                   <a:srgbClr val="FF0000"/>
                 </a:solidFill>
@@ -5062,65 +5090,6 @@
       </p:sp>
       <p:sp>
         <p:nvSpPr>
-          <p:cNvPr id="11" name="Explosion: 8 Points 10">
-            <a:extLst>
-              <a:ext uri="{FF2B5EF4-FFF2-40B4-BE49-F238E27FC236}">
-                <a16:creationId xmlns:a16="http://schemas.microsoft.com/office/drawing/2014/main" id="{DDC43374-70A6-00EF-74B3-C8B3C5E385D4}"/>
-              </a:ext>
-            </a:extLst>
-          </p:cNvPr>
-          <p:cNvSpPr/>
-          <p:nvPr/>
-        </p:nvSpPr>
-        <p:spPr>
-          <a:xfrm rot="-600000">
-            <a:off x="5710034" y="2916043"/>
-            <a:ext cx="5501391" cy="2926817"/>
-          </a:xfrm>
-          <a:prstGeom prst="irregularSeal1">
-            <a:avLst/>
-          </a:prstGeom>
-        </p:spPr>
-        <p:style>
-          <a:lnRef idx="0">
-            <a:schemeClr val="accent2"/>
-          </a:lnRef>
-          <a:fillRef idx="3">
-            <a:schemeClr val="accent2"/>
-          </a:fillRef>
-          <a:effectRef idx="3">
-            <a:schemeClr val="accent2"/>
-          </a:effectRef>
-          <a:fontRef idx="minor">
-            <a:schemeClr val="lt1"/>
-          </a:fontRef>
-        </p:style>
-        <p:txBody>
-          <a:bodyPr rtlCol="0" anchor="ctr"/>
-          <a:lstStyle/>
-          <a:p>
-            <a:pPr algn="ctr"/>
-            <a:r>
-              <a:rPr lang="id-ID" sz="3600" b="1" spc="50" dirty="0">
-                <a:ln w="0"/>
-                <a:solidFill>
-                  <a:schemeClr val="bg2"/>
-                </a:solidFill>
-                <a:effectLst>
-                  <a:innerShdw blurRad="63500" dist="50800" dir="13500000">
-                    <a:srgbClr val="000000">
-                      <a:alpha val="50000"/>
-                    </a:srgbClr>
-                  </a:innerShdw>
-                </a:effectLst>
-              </a:rPr>
-              <a:t>Pesan Sekarang</a:t>
-            </a:r>
-          </a:p>
-        </p:txBody>
-      </p:sp>
-      <p:sp>
-        <p:nvSpPr>
           <p:cNvPr id="6" name="TextBox 5">
             <a:extLst>
               <a:ext uri="{FF2B5EF4-FFF2-40B4-BE49-F238E27FC236}">
@@ -5133,7 +5102,7 @@
         </p:nvSpPr>
         <p:spPr>
           <a:xfrm>
-            <a:off x="1933543" y="3893696"/>
+            <a:off x="1870997" y="4879664"/>
             <a:ext cx="3322820" cy="923330"/>
           </a:xfrm>
           <a:prstGeom prst="rect">
@@ -5227,6 +5196,87 @@
               </a:rPr>
               <a:t>Website : website.com</a:t>
             </a:r>
+          </a:p>
+        </p:txBody>
+      </p:sp>
+      <p:sp>
+        <p:nvSpPr>
+          <p:cNvPr id="13" name="Explosion: 8 Points 12">
+            <a:extLst>
+              <a:ext uri="{FF2B5EF4-FFF2-40B4-BE49-F238E27FC236}">
+                <a16:creationId xmlns:a16="http://schemas.microsoft.com/office/drawing/2014/main" id="{D5FF7DD5-0A36-67D7-B457-2DD136153D2B}"/>
+              </a:ext>
+            </a:extLst>
+          </p:cNvPr>
+          <p:cNvSpPr/>
+          <p:nvPr/>
+        </p:nvSpPr>
+        <p:spPr>
+          <a:xfrm rot="-1140000">
+            <a:off x="6785787" y="2232273"/>
+            <a:ext cx="4847040" cy="4246176"/>
+          </a:xfrm>
+          <a:prstGeom prst="irregularSeal1">
+            <a:avLst/>
+          </a:prstGeom>
+          <a:gradFill flip="none" rotWithShape="1">
+            <a:gsLst>
+              <a:gs pos="0">
+                <a:schemeClr val="accent6">
+                  <a:lumMod val="67000"/>
+                </a:schemeClr>
+              </a:gs>
+              <a:gs pos="48000">
+                <a:schemeClr val="accent6">
+                  <a:lumMod val="97000"/>
+                  <a:lumOff val="3000"/>
+                </a:schemeClr>
+              </a:gs>
+              <a:gs pos="100000">
+                <a:schemeClr val="accent6">
+                  <a:lumMod val="60000"/>
+                  <a:lumOff val="40000"/>
+                </a:schemeClr>
+              </a:gs>
+            </a:gsLst>
+            <a:lin ang="16200000" scaled="1"/>
+            <a:tileRect/>
+          </a:gradFill>
+          <a:ln>
+            <a:noFill/>
+          </a:ln>
+        </p:spPr>
+        <p:style>
+          <a:lnRef idx="0">
+            <a:scrgbClr r="0" g="0" b="0"/>
+          </a:lnRef>
+          <a:fillRef idx="0">
+            <a:scrgbClr r="0" g="0" b="0"/>
+          </a:fillRef>
+          <a:effectRef idx="0">
+            <a:scrgbClr r="0" g="0" b="0"/>
+          </a:effectRef>
+          <a:fontRef idx="minor">
+            <a:schemeClr val="lt1"/>
+          </a:fontRef>
+        </p:style>
+        <p:txBody>
+          <a:bodyPr rtlCol="0" anchor="ctr"/>
+          <a:lstStyle/>
+          <a:p>
+            <a:pPr algn="ctr"/>
+            <a:r>
+              <a:rPr lang="en-US" sz="3200" b="1" dirty="0"/>
+              <a:t>PESAN</a:t>
+            </a:r>
+          </a:p>
+          <a:p>
+            <a:pPr algn="ctr"/>
+            <a:r>
+              <a:rPr lang="en-US" sz="3200" b="1" dirty="0"/>
+              <a:t>SEKARANG !!!</a:t>
+            </a:r>
+            <a:endParaRPr lang="id-ID" sz="3200" b="1" dirty="0"/>
           </a:p>
         </p:txBody>
       </p:sp>
